--- a/Presentation/Ciaran O' Toole - C00297672 Project Presentation.pptx
+++ b/Presentation/Ciaran O' Toole - C00297672 Project Presentation.pptx
@@ -10697,7 +10697,7 @@
         <p:fade thruBlk="1"/>
       </p:transition>
     </mc:Choice>
-    <mc:Fallback xmlns:ahyp="http://schemas.microsoft.com/office/drawing/2018/hyperlinkcolor" xmlns:p15="http://schemas.microsoft.com/office/powerpoint/2012/main" xmlns:com="http://schemas.openxmlformats.org/drawingml/2006/compatibility" xmlns:pvml="urn:schemas-microsoft-com:office:powerpoint" xmlns:v="urn:schemas-microsoft-com:vml" xmlns:o="urn:schemas-microsoft-com:office:office" xmlns:dgm="http://schemas.openxmlformats.org/drawingml/2006/diagram" xmlns:c="http://schemas.openxmlformats.org/drawingml/2006/chart" xmlns:mv="urn:schemas-microsoft-com:mac:vml" xmlns="">
+    <mc:Fallback xmlns="" xmlns:mv="urn:schemas-microsoft-com:mac:vml" xmlns:c="http://schemas.openxmlformats.org/drawingml/2006/chart" xmlns:dgm="http://schemas.openxmlformats.org/drawingml/2006/diagram" xmlns:o="urn:schemas-microsoft-com:office:office" xmlns:v="urn:schemas-microsoft-com:vml" xmlns:pvml="urn:schemas-microsoft-com:office:powerpoint" xmlns:com="http://schemas.openxmlformats.org/drawingml/2006/compatibility" xmlns:p15="http://schemas.microsoft.com/office/powerpoint/2012/main" xmlns:ahyp="http://schemas.microsoft.com/office/drawing/2018/hyperlinkcolor">
       <p:transition spd="slow">
         <p:fade/>
       </p:transition>
